--- a/ゲーム科1年/01_後期/プログラミングⅢ/02_アクセス制御.pptx
+++ b/ゲーム科1年/01_後期/プログラミングⅢ/02_アクセス制御.pptx
@@ -266,7 +266,7 @@
           <a:p>
             <a:fld id="{E9CC885B-4903-4D54-9A93-00025F12DED9}" type="datetimeFigureOut">
               <a:rPr kumimoji="1" lang="ja-JP" altLang="en-US" smtClean="0"/>
-              <a:t>2024/11/8</a:t>
+              <a:t>2025/2/7</a:t>
             </a:fld>
             <a:endParaRPr kumimoji="1" lang="ja-JP" altLang="en-US"/>
           </a:p>
@@ -496,7 +496,7 @@
           <a:p>
             <a:fld id="{E9CC885B-4903-4D54-9A93-00025F12DED9}" type="datetimeFigureOut">
               <a:rPr kumimoji="1" lang="ja-JP" altLang="en-US" smtClean="0"/>
-              <a:t>2024/11/8</a:t>
+              <a:t>2025/2/7</a:t>
             </a:fld>
             <a:endParaRPr kumimoji="1" lang="ja-JP" altLang="en-US"/>
           </a:p>
@@ -736,7 +736,7 @@
           <a:p>
             <a:fld id="{E9CC885B-4903-4D54-9A93-00025F12DED9}" type="datetimeFigureOut">
               <a:rPr kumimoji="1" lang="ja-JP" altLang="en-US" smtClean="0"/>
-              <a:t>2024/11/8</a:t>
+              <a:t>2025/2/7</a:t>
             </a:fld>
             <a:endParaRPr kumimoji="1" lang="ja-JP" altLang="en-US"/>
           </a:p>
@@ -966,7 +966,7 @@
           <a:p>
             <a:fld id="{E9CC885B-4903-4D54-9A93-00025F12DED9}" type="datetimeFigureOut">
               <a:rPr kumimoji="1" lang="ja-JP" altLang="en-US" smtClean="0"/>
-              <a:t>2024/11/8</a:t>
+              <a:t>2025/2/7</a:t>
             </a:fld>
             <a:endParaRPr kumimoji="1" lang="ja-JP" altLang="en-US"/>
           </a:p>
@@ -1241,7 +1241,7 @@
           <a:p>
             <a:fld id="{E9CC885B-4903-4D54-9A93-00025F12DED9}" type="datetimeFigureOut">
               <a:rPr kumimoji="1" lang="ja-JP" altLang="en-US" smtClean="0"/>
-              <a:t>2024/11/8</a:t>
+              <a:t>2025/2/7</a:t>
             </a:fld>
             <a:endParaRPr kumimoji="1" lang="ja-JP" altLang="en-US"/>
           </a:p>
@@ -1570,7 +1570,7 @@
           <a:p>
             <a:fld id="{E9CC885B-4903-4D54-9A93-00025F12DED9}" type="datetimeFigureOut">
               <a:rPr kumimoji="1" lang="ja-JP" altLang="en-US" smtClean="0"/>
-              <a:t>2024/11/8</a:t>
+              <a:t>2025/2/7</a:t>
             </a:fld>
             <a:endParaRPr kumimoji="1" lang="ja-JP" altLang="en-US"/>
           </a:p>
@@ -2046,7 +2046,7 @@
           <a:p>
             <a:fld id="{E9CC885B-4903-4D54-9A93-00025F12DED9}" type="datetimeFigureOut">
               <a:rPr kumimoji="1" lang="ja-JP" altLang="en-US" smtClean="0"/>
-              <a:t>2024/11/8</a:t>
+              <a:t>2025/2/7</a:t>
             </a:fld>
             <a:endParaRPr kumimoji="1" lang="ja-JP" altLang="en-US"/>
           </a:p>
@@ -2187,7 +2187,7 @@
           <a:p>
             <a:fld id="{E9CC885B-4903-4D54-9A93-00025F12DED9}" type="datetimeFigureOut">
               <a:rPr kumimoji="1" lang="ja-JP" altLang="en-US" smtClean="0"/>
-              <a:t>2024/11/8</a:t>
+              <a:t>2025/2/7</a:t>
             </a:fld>
             <a:endParaRPr kumimoji="1" lang="ja-JP" altLang="en-US"/>
           </a:p>
@@ -2300,7 +2300,7 @@
           <a:p>
             <a:fld id="{E9CC885B-4903-4D54-9A93-00025F12DED9}" type="datetimeFigureOut">
               <a:rPr kumimoji="1" lang="ja-JP" altLang="en-US" smtClean="0"/>
-              <a:t>2024/11/8</a:t>
+              <a:t>2025/2/7</a:t>
             </a:fld>
             <a:endParaRPr kumimoji="1" lang="ja-JP" altLang="en-US"/>
           </a:p>
@@ -2643,7 +2643,7 @@
           <a:p>
             <a:fld id="{E9CC885B-4903-4D54-9A93-00025F12DED9}" type="datetimeFigureOut">
               <a:rPr kumimoji="1" lang="ja-JP" altLang="en-US" smtClean="0"/>
-              <a:t>2024/11/8</a:t>
+              <a:t>2025/2/7</a:t>
             </a:fld>
             <a:endParaRPr kumimoji="1" lang="ja-JP" altLang="en-US"/>
           </a:p>
@@ -2931,7 +2931,7 @@
           <a:p>
             <a:fld id="{E9CC885B-4903-4D54-9A93-00025F12DED9}" type="datetimeFigureOut">
               <a:rPr kumimoji="1" lang="ja-JP" altLang="en-US" smtClean="0"/>
-              <a:t>2024/11/8</a:t>
+              <a:t>2025/2/7</a:t>
             </a:fld>
             <a:endParaRPr kumimoji="1" lang="ja-JP" altLang="en-US"/>
           </a:p>
@@ -3204,7 +3204,7 @@
           <a:p>
             <a:fld id="{E9CC885B-4903-4D54-9A93-00025F12DED9}" type="datetimeFigureOut">
               <a:rPr kumimoji="1" lang="ja-JP" altLang="en-US" smtClean="0"/>
-              <a:t>2024/11/8</a:t>
+              <a:t>2025/2/7</a:t>
             </a:fld>
             <a:endParaRPr kumimoji="1" lang="ja-JP" altLang="en-US"/>
           </a:p>
@@ -4466,8 +4466,16 @@
               <a:t>Main</a:t>
             </a:r>
             <a:r>
+              <a:rPr lang="ja-JP" altLang="en-US" sz="2400" b="1" dirty="0">
+                <a:solidFill>
+                  <a:srgbClr val="0070C0"/>
+                </a:solidFill>
+              </a:rPr>
+              <a:t>関数</a:t>
+            </a:r>
+            <a:r>
               <a:rPr lang="ja-JP" altLang="en-US" sz="2400" dirty="0"/>
-              <a:t>関数で使用することができません。</a:t>
+              <a:t>で使用することができません。</a:t>
             </a:r>
             <a:endParaRPr lang="en-US" altLang="ja-JP" sz="2400" dirty="0"/>
           </a:p>

--- a/ゲーム科1年/01_後期/プログラミングⅢ/02_アクセス制御.pptx
+++ b/ゲーム科1年/01_後期/プログラミングⅢ/02_アクセス制御.pptx
@@ -266,7 +266,7 @@
           <a:p>
             <a:fld id="{E9CC885B-4903-4D54-9A93-00025F12DED9}" type="datetimeFigureOut">
               <a:rPr kumimoji="1" lang="ja-JP" altLang="en-US" smtClean="0"/>
-              <a:t>2025/2/7</a:t>
+              <a:t>2026/5/15</a:t>
             </a:fld>
             <a:endParaRPr kumimoji="1" lang="ja-JP" altLang="en-US"/>
           </a:p>
@@ -496,7 +496,7 @@
           <a:p>
             <a:fld id="{E9CC885B-4903-4D54-9A93-00025F12DED9}" type="datetimeFigureOut">
               <a:rPr kumimoji="1" lang="ja-JP" altLang="en-US" smtClean="0"/>
-              <a:t>2025/2/7</a:t>
+              <a:t>2026/5/15</a:t>
             </a:fld>
             <a:endParaRPr kumimoji="1" lang="ja-JP" altLang="en-US"/>
           </a:p>
@@ -736,7 +736,7 @@
           <a:p>
             <a:fld id="{E9CC885B-4903-4D54-9A93-00025F12DED9}" type="datetimeFigureOut">
               <a:rPr kumimoji="1" lang="ja-JP" altLang="en-US" smtClean="0"/>
-              <a:t>2025/2/7</a:t>
+              <a:t>2026/5/15</a:t>
             </a:fld>
             <a:endParaRPr kumimoji="1" lang="ja-JP" altLang="en-US"/>
           </a:p>
@@ -966,7 +966,7 @@
           <a:p>
             <a:fld id="{E9CC885B-4903-4D54-9A93-00025F12DED9}" type="datetimeFigureOut">
               <a:rPr kumimoji="1" lang="ja-JP" altLang="en-US" smtClean="0"/>
-              <a:t>2025/2/7</a:t>
+              <a:t>2026/5/15</a:t>
             </a:fld>
             <a:endParaRPr kumimoji="1" lang="ja-JP" altLang="en-US"/>
           </a:p>
@@ -1241,7 +1241,7 @@
           <a:p>
             <a:fld id="{E9CC885B-4903-4D54-9A93-00025F12DED9}" type="datetimeFigureOut">
               <a:rPr kumimoji="1" lang="ja-JP" altLang="en-US" smtClean="0"/>
-              <a:t>2025/2/7</a:t>
+              <a:t>2026/5/15</a:t>
             </a:fld>
             <a:endParaRPr kumimoji="1" lang="ja-JP" altLang="en-US"/>
           </a:p>
@@ -1570,7 +1570,7 @@
           <a:p>
             <a:fld id="{E9CC885B-4903-4D54-9A93-00025F12DED9}" type="datetimeFigureOut">
               <a:rPr kumimoji="1" lang="ja-JP" altLang="en-US" smtClean="0"/>
-              <a:t>2025/2/7</a:t>
+              <a:t>2026/5/15</a:t>
             </a:fld>
             <a:endParaRPr kumimoji="1" lang="ja-JP" altLang="en-US"/>
           </a:p>
@@ -2046,7 +2046,7 @@
           <a:p>
             <a:fld id="{E9CC885B-4903-4D54-9A93-00025F12DED9}" type="datetimeFigureOut">
               <a:rPr kumimoji="1" lang="ja-JP" altLang="en-US" smtClean="0"/>
-              <a:t>2025/2/7</a:t>
+              <a:t>2026/5/15</a:t>
             </a:fld>
             <a:endParaRPr kumimoji="1" lang="ja-JP" altLang="en-US"/>
           </a:p>
@@ -2187,7 +2187,7 @@
           <a:p>
             <a:fld id="{E9CC885B-4903-4D54-9A93-00025F12DED9}" type="datetimeFigureOut">
               <a:rPr kumimoji="1" lang="ja-JP" altLang="en-US" smtClean="0"/>
-              <a:t>2025/2/7</a:t>
+              <a:t>2026/5/15</a:t>
             </a:fld>
             <a:endParaRPr kumimoji="1" lang="ja-JP" altLang="en-US"/>
           </a:p>
@@ -2300,7 +2300,7 @@
           <a:p>
             <a:fld id="{E9CC885B-4903-4D54-9A93-00025F12DED9}" type="datetimeFigureOut">
               <a:rPr kumimoji="1" lang="ja-JP" altLang="en-US" smtClean="0"/>
-              <a:t>2025/2/7</a:t>
+              <a:t>2026/5/15</a:t>
             </a:fld>
             <a:endParaRPr kumimoji="1" lang="ja-JP" altLang="en-US"/>
           </a:p>
@@ -2643,7 +2643,7 @@
           <a:p>
             <a:fld id="{E9CC885B-4903-4D54-9A93-00025F12DED9}" type="datetimeFigureOut">
               <a:rPr kumimoji="1" lang="ja-JP" altLang="en-US" smtClean="0"/>
-              <a:t>2025/2/7</a:t>
+              <a:t>2026/5/15</a:t>
             </a:fld>
             <a:endParaRPr kumimoji="1" lang="ja-JP" altLang="en-US"/>
           </a:p>
@@ -2931,7 +2931,7 @@
           <a:p>
             <a:fld id="{E9CC885B-4903-4D54-9A93-00025F12DED9}" type="datetimeFigureOut">
               <a:rPr kumimoji="1" lang="ja-JP" altLang="en-US" smtClean="0"/>
-              <a:t>2025/2/7</a:t>
+              <a:t>2026/5/15</a:t>
             </a:fld>
             <a:endParaRPr kumimoji="1" lang="ja-JP" altLang="en-US"/>
           </a:p>
@@ -3204,7 +3204,7 @@
           <a:p>
             <a:fld id="{E9CC885B-4903-4D54-9A93-00025F12DED9}" type="datetimeFigureOut">
               <a:rPr kumimoji="1" lang="ja-JP" altLang="en-US" smtClean="0"/>
-              <a:t>2025/2/7</a:t>
+              <a:t>2026/5/15</a:t>
             </a:fld>
             <a:endParaRPr kumimoji="1" lang="ja-JP" altLang="en-US"/>
           </a:p>
@@ -3813,7 +3813,7 @@
         <p:spPr>
           <a:xfrm>
             <a:off x="567542" y="1216429"/>
-            <a:ext cx="10580140" cy="830997"/>
+            <a:ext cx="11564384" cy="830997"/>
           </a:xfrm>
           <a:prstGeom prst="rect">
             <a:avLst/>
@@ -3871,7 +3871,7 @@
                   <a:srgbClr val="FF0000"/>
                 </a:solidFill>
               </a:rPr>
-              <a:t>よりも下に書いてあるものは外でも使用可能</a:t>
+              <a:t>よりも下に書いてあるものはクラスの外でも使用可能</a:t>
             </a:r>
             <a:r>
               <a:rPr lang="ja-JP" altLang="en-US" sz="2400" dirty="0"/>
@@ -4198,7 +4198,7 @@
         <p:spPr>
           <a:xfrm>
             <a:off x="567542" y="1216429"/>
-            <a:ext cx="10390986" cy="830997"/>
+            <a:ext cx="11687815" cy="830997"/>
           </a:xfrm>
           <a:prstGeom prst="rect">
             <a:avLst/>
@@ -4256,7 +4256,7 @@
                   <a:srgbClr val="FF0000"/>
                 </a:solidFill>
               </a:rPr>
-              <a:t>よりも下に書いてあるものは外では使用不可</a:t>
+              <a:t>よりも下に書いてあるものはクラスの外では使用不可</a:t>
             </a:r>
             <a:r>
               <a:rPr lang="ja-JP" altLang="en-US" sz="2400" dirty="0"/>
